--- a/prezentacie/p02w.pptx
+++ b/prezentacie/p02w.pptx
@@ -249,7 +249,7 @@
           <a:p>
             <a:fld id="{10052495-8BC8-4CFB-94B1-B0429F101A0D}" type="datetimeFigureOut">
               <a:rPr lang="sk-SK" smtClean="0"/>
-              <a:t>10. 9. 2025</a:t>
+              <a:t>9. 9. 2026</a:t>
             </a:fld>
             <a:endParaRPr lang="sk-SK"/>
           </a:p>
@@ -419,7 +419,7 @@
           <a:p>
             <a:fld id="{10052495-8BC8-4CFB-94B1-B0429F101A0D}" type="datetimeFigureOut">
               <a:rPr lang="sk-SK" smtClean="0"/>
-              <a:t>10. 9. 2025</a:t>
+              <a:t>9. 9. 2026</a:t>
             </a:fld>
             <a:endParaRPr lang="sk-SK"/>
           </a:p>
@@ -599,7 +599,7 @@
           <a:p>
             <a:fld id="{10052495-8BC8-4CFB-94B1-B0429F101A0D}" type="datetimeFigureOut">
               <a:rPr lang="sk-SK" smtClean="0"/>
-              <a:t>10. 9. 2025</a:t>
+              <a:t>9. 9. 2026</a:t>
             </a:fld>
             <a:endParaRPr lang="sk-SK"/>
           </a:p>
@@ -769,7 +769,7 @@
           <a:p>
             <a:fld id="{10052495-8BC8-4CFB-94B1-B0429F101A0D}" type="datetimeFigureOut">
               <a:rPr lang="sk-SK" smtClean="0"/>
-              <a:t>10. 9. 2025</a:t>
+              <a:t>9. 9. 2026</a:t>
             </a:fld>
             <a:endParaRPr lang="sk-SK"/>
           </a:p>
@@ -1015,7 +1015,7 @@
           <a:p>
             <a:fld id="{10052495-8BC8-4CFB-94B1-B0429F101A0D}" type="datetimeFigureOut">
               <a:rPr lang="sk-SK" smtClean="0"/>
-              <a:t>10. 9. 2025</a:t>
+              <a:t>9. 9. 2026</a:t>
             </a:fld>
             <a:endParaRPr lang="sk-SK"/>
           </a:p>
@@ -1247,7 +1247,7 @@
           <a:p>
             <a:fld id="{10052495-8BC8-4CFB-94B1-B0429F101A0D}" type="datetimeFigureOut">
               <a:rPr lang="sk-SK" smtClean="0"/>
-              <a:t>10. 9. 2025</a:t>
+              <a:t>9. 9. 2026</a:t>
             </a:fld>
             <a:endParaRPr lang="sk-SK"/>
           </a:p>
@@ -1614,7 +1614,7 @@
           <a:p>
             <a:fld id="{10052495-8BC8-4CFB-94B1-B0429F101A0D}" type="datetimeFigureOut">
               <a:rPr lang="sk-SK" smtClean="0"/>
-              <a:t>10. 9. 2025</a:t>
+              <a:t>9. 9. 2026</a:t>
             </a:fld>
             <a:endParaRPr lang="sk-SK"/>
           </a:p>
@@ -1732,7 +1732,7 @@
           <a:p>
             <a:fld id="{10052495-8BC8-4CFB-94B1-B0429F101A0D}" type="datetimeFigureOut">
               <a:rPr lang="sk-SK" smtClean="0"/>
-              <a:t>10. 9. 2025</a:t>
+              <a:t>9. 9. 2026</a:t>
             </a:fld>
             <a:endParaRPr lang="sk-SK"/>
           </a:p>
@@ -1827,7 +1827,7 @@
           <a:p>
             <a:fld id="{10052495-8BC8-4CFB-94B1-B0429F101A0D}" type="datetimeFigureOut">
               <a:rPr lang="sk-SK" smtClean="0"/>
-              <a:t>10. 9. 2025</a:t>
+              <a:t>9. 9. 2026</a:t>
             </a:fld>
             <a:endParaRPr lang="sk-SK"/>
           </a:p>
@@ -2104,7 +2104,7 @@
           <a:p>
             <a:fld id="{10052495-8BC8-4CFB-94B1-B0429F101A0D}" type="datetimeFigureOut">
               <a:rPr lang="sk-SK" smtClean="0"/>
-              <a:t>10. 9. 2025</a:t>
+              <a:t>9. 9. 2026</a:t>
             </a:fld>
             <a:endParaRPr lang="sk-SK"/>
           </a:p>
@@ -2361,7 +2361,7 @@
           <a:p>
             <a:fld id="{10052495-8BC8-4CFB-94B1-B0429F101A0D}" type="datetimeFigureOut">
               <a:rPr lang="sk-SK" smtClean="0"/>
-              <a:t>10. 9. 2025</a:t>
+              <a:t>9. 9. 2026</a:t>
             </a:fld>
             <a:endParaRPr lang="sk-SK"/>
           </a:p>
@@ -2574,7 +2574,7 @@
           <a:p>
             <a:fld id="{10052495-8BC8-4CFB-94B1-B0429F101A0D}" type="datetimeFigureOut">
               <a:rPr lang="sk-SK" smtClean="0"/>
-              <a:t>10. 9. 2025</a:t>
+              <a:t>9. 9. 2026</a:t>
             </a:fld>
             <a:endParaRPr lang="sk-SK"/>
           </a:p>
@@ -3516,7 +3516,15 @@
             </a:br>
             <a:r>
               <a:rPr lang="sk-SK" b="1" dirty="0"/>
-              <a:t>Ing. Jozef Wagner PhD.</a:t>
+              <a:t>Ing. Jozef Wagner</a:t>
+            </a:r>
+            <a:r>
+              <a:rPr lang="en-US" b="1" dirty="0"/>
+              <a:t>,</a:t>
+            </a:r>
+            <a:r>
+              <a:rPr lang="sk-SK" b="1" dirty="0"/>
+              <a:t> PhD.</a:t>
             </a:r>
           </a:p>
           <a:p>
@@ -4228,42 +4236,82 @@
               <a:buNone/>
             </a:pPr>
             <a:r>
-              <a:rPr lang="fr-FR" sz="2800" b="1" dirty="0" err="1"/>
+              <a:rPr lang="fr-FR" sz="2800" b="1" dirty="0" err="1">
+                <a:highlight>
+                  <a:srgbClr val="00FFFF"/>
+                </a:highlight>
+              </a:rPr>
               <a:t>Literál</a:t>
             </a:r>
             <a:r>
-              <a:rPr lang="fr-FR" sz="2800" dirty="0"/>
+              <a:rPr lang="fr-FR" sz="2800" dirty="0">
+                <a:highlight>
+                  <a:srgbClr val="00FFFF"/>
+                </a:highlight>
+              </a:rPr>
               <a:t> je </a:t>
             </a:r>
             <a:r>
-              <a:rPr lang="fr-FR" sz="2800" dirty="0" err="1"/>
+              <a:rPr lang="fr-FR" sz="2800" dirty="0" err="1">
+                <a:highlight>
+                  <a:srgbClr val="00FFFF"/>
+                </a:highlight>
+              </a:rPr>
               <a:t>zápis</a:t>
             </a:r>
             <a:r>
-              <a:rPr lang="fr-FR" sz="2800" dirty="0"/>
+              <a:rPr lang="fr-FR" sz="2800" dirty="0">
+                <a:highlight>
+                  <a:srgbClr val="00FFFF"/>
+                </a:highlight>
+              </a:rPr>
               <a:t> </a:t>
             </a:r>
             <a:r>
-              <a:rPr lang="fr-FR" sz="2800" dirty="0" err="1"/>
+              <a:rPr lang="fr-FR" sz="2800" dirty="0" err="1">
+                <a:highlight>
+                  <a:srgbClr val="00FFFF"/>
+                </a:highlight>
+              </a:rPr>
               <a:t>údaja</a:t>
             </a:r>
             <a:r>
-              <a:rPr lang="fr-FR" sz="2800" dirty="0"/>
+              <a:rPr lang="fr-FR" sz="2800" dirty="0">
+                <a:highlight>
+                  <a:srgbClr val="00FFFF"/>
+                </a:highlight>
+              </a:rPr>
               <a:t> </a:t>
             </a:r>
             <a:r>
-              <a:rPr lang="fr-FR" sz="2800" dirty="0" err="1"/>
+              <a:rPr lang="fr-FR" sz="2800" dirty="0" err="1">
+                <a:highlight>
+                  <a:srgbClr val="00FFFF"/>
+                </a:highlight>
+              </a:rPr>
               <a:t>priamo</a:t>
             </a:r>
             <a:r>
-              <a:rPr lang="fr-FR" sz="2800" dirty="0"/>
+              <a:rPr lang="fr-FR" sz="2800" dirty="0">
+                <a:highlight>
+                  <a:srgbClr val="00FFFF"/>
+                </a:highlight>
+              </a:rPr>
               <a:t> v </a:t>
             </a:r>
             <a:r>
-              <a:rPr lang="fr-FR" sz="2800" dirty="0" err="1"/>
+              <a:rPr lang="fr-FR" sz="2800" dirty="0" err="1">
+                <a:highlight>
+                  <a:srgbClr val="00FFFF"/>
+                </a:highlight>
+              </a:rPr>
               <a:t>kóde</a:t>
             </a:r>
-            <a:endParaRPr lang="sk-SK" sz="2800" dirty="0"/>
+            <a:endParaRPr lang="sk-SK" sz="2800" dirty="0">
+              <a:highlight>
+                <a:srgbClr val="00FFFF"/>
+              </a:highlight>
+            </a:endParaRPr>
           </a:p>
           <a:p>
             <a:pPr marL="0" indent="0">
@@ -4274,6 +4322,9 @@
             </a:pPr>
             <a:r>
               <a:rPr lang="sk-SK" dirty="0">
+                <a:solidFill>
+                  <a:srgbClr val="C00000"/>
+                </a:solidFill>
                 <a:highlight>
                   <a:srgbClr val="FFFF00"/>
                 </a:highlight>
@@ -4282,11 +4333,18 @@
               <a:t>3</a:t>
             </a:r>
             <a:r>
-              <a:rPr lang="sk-SK" dirty="0"/>
+              <a:rPr lang="sk-SK" dirty="0">
+                <a:solidFill>
+                  <a:srgbClr val="C00000"/>
+                </a:solidFill>
+              </a:rPr>
               <a:t>, </a:t>
             </a:r>
             <a:r>
               <a:rPr lang="sk-SK" dirty="0">
+                <a:solidFill>
+                  <a:srgbClr val="C00000"/>
+                </a:solidFill>
                 <a:highlight>
                   <a:srgbClr val="FFFF00"/>
                 </a:highlight>
@@ -4296,6 +4354,9 @@
             </a:r>
             <a:r>
               <a:rPr lang="sk-SK" dirty="0" err="1">
+                <a:solidFill>
+                  <a:srgbClr val="C00000"/>
+                </a:solidFill>
                 <a:highlight>
                   <a:srgbClr val="FFFF00"/>
                 </a:highlight>
@@ -4305,6 +4366,9 @@
             </a:r>
             <a:r>
               <a:rPr lang="sk-SK" dirty="0">
+                <a:solidFill>
+                  <a:srgbClr val="C00000"/>
+                </a:solidFill>
                 <a:highlight>
                   <a:srgbClr val="FFFF00"/>
                 </a:highlight>
@@ -4313,11 +4377,18 @@
               <a:t>"</a:t>
             </a:r>
             <a:r>
-              <a:rPr lang="sk-SK" dirty="0"/>
+              <a:rPr lang="sk-SK" dirty="0">
+                <a:solidFill>
+                  <a:srgbClr val="C00000"/>
+                </a:solidFill>
+              </a:rPr>
               <a:t>, </a:t>
             </a:r>
             <a:r>
               <a:rPr lang="sk-SK" dirty="0">
+                <a:solidFill>
+                  <a:srgbClr val="C00000"/>
+                </a:solidFill>
                 <a:highlight>
                   <a:srgbClr val="FFFF00"/>
                 </a:highlight>
@@ -4343,46 +4414,90 @@
               <a:buNone/>
             </a:pPr>
             <a:r>
-              <a:rPr lang="fr-FR" sz="2800" b="1" dirty="0" err="1"/>
+              <a:rPr lang="fr-FR" sz="2800" b="1" dirty="0" err="1">
+                <a:highlight>
+                  <a:srgbClr val="00FFFF"/>
+                </a:highlight>
+              </a:rPr>
               <a:t>Príkaz</a:t>
             </a:r>
             <a:r>
-              <a:rPr lang="fr-FR" sz="2800" dirty="0"/>
+              <a:rPr lang="fr-FR" sz="2800" dirty="0">
+                <a:highlight>
+                  <a:srgbClr val="00FFFF"/>
+                </a:highlight>
+              </a:rPr>
               <a:t> </a:t>
             </a:r>
             <a:r>
-              <a:rPr lang="sk-SK" dirty="0"/>
+              <a:rPr lang="sk-SK" dirty="0">
+                <a:highlight>
+                  <a:srgbClr val="00FFFF"/>
+                </a:highlight>
+              </a:rPr>
               <a:t>(</a:t>
             </a:r>
             <a:r>
-              <a:rPr lang="sk-SK" dirty="0" err="1"/>
+              <a:rPr lang="sk-SK" dirty="0" err="1">
+                <a:highlight>
+                  <a:srgbClr val="00FFFF"/>
+                </a:highlight>
+              </a:rPr>
               <a:t>statement</a:t>
             </a:r>
             <a:r>
-              <a:rPr lang="sk-SK" dirty="0"/>
+              <a:rPr lang="sk-SK" dirty="0">
+                <a:highlight>
+                  <a:srgbClr val="00FFFF"/>
+                </a:highlight>
+              </a:rPr>
               <a:t>) </a:t>
             </a:r>
             <a:r>
-              <a:rPr lang="fr-FR" sz="2800" dirty="0" err="1"/>
+              <a:rPr lang="fr-FR" sz="2800" dirty="0" err="1">
+                <a:highlight>
+                  <a:srgbClr val="00FFFF"/>
+                </a:highlight>
+              </a:rPr>
               <a:t>vykoná</a:t>
             </a:r>
             <a:r>
-              <a:rPr lang="fr-FR" sz="2800" dirty="0"/>
+              <a:rPr lang="fr-FR" sz="2800" dirty="0">
+                <a:highlight>
+                  <a:srgbClr val="00FFFF"/>
+                </a:highlight>
+              </a:rPr>
               <a:t> </a:t>
             </a:r>
             <a:r>
-              <a:rPr lang="fr-FR" sz="2800" dirty="0" err="1"/>
+              <a:rPr lang="fr-FR" sz="2800" dirty="0" err="1">
+                <a:highlight>
+                  <a:srgbClr val="00FFFF"/>
+                </a:highlight>
+              </a:rPr>
               <a:t>akciu</a:t>
             </a:r>
             <a:r>
-              <a:rPr lang="fr-FR" sz="2800" dirty="0"/>
+              <a:rPr lang="fr-FR" sz="2800" dirty="0">
+                <a:highlight>
+                  <a:srgbClr val="00FFFF"/>
+                </a:highlight>
+              </a:rPr>
               <a:t>, je </a:t>
             </a:r>
             <a:r>
-              <a:rPr lang="fr-FR" sz="2800" dirty="0" err="1"/>
+              <a:rPr lang="fr-FR" sz="2800" dirty="0" err="1">
+                <a:highlight>
+                  <a:srgbClr val="00FFFF"/>
+                </a:highlight>
+              </a:rPr>
               <a:t>samostatný</a:t>
             </a:r>
-            <a:endParaRPr lang="sk-SK" sz="2800" dirty="0"/>
+            <a:endParaRPr lang="sk-SK" sz="2800" dirty="0">
+              <a:highlight>
+                <a:srgbClr val="00FFFF"/>
+              </a:highlight>
+            </a:endParaRPr>
           </a:p>
           <a:p>
             <a:pPr marL="0" indent="0">
@@ -4393,6 +4508,9 @@
             </a:pPr>
             <a:r>
               <a:rPr lang="sk-SK" dirty="0" err="1">
+                <a:solidFill>
+                  <a:srgbClr val="C00000"/>
+                </a:solidFill>
                 <a:highlight>
                   <a:srgbClr val="FFFF00"/>
                 </a:highlight>
@@ -4401,11 +4519,18 @@
               <a:t>if</a:t>
             </a:r>
             <a:r>
-              <a:rPr lang="sk-SK" dirty="0"/>
+              <a:rPr lang="sk-SK" dirty="0">
+                <a:solidFill>
+                  <a:srgbClr val="C00000"/>
+                </a:solidFill>
+              </a:rPr>
               <a:t>, </a:t>
             </a:r>
             <a:r>
               <a:rPr lang="sk-SK" dirty="0" err="1">
+                <a:solidFill>
+                  <a:srgbClr val="C00000"/>
+                </a:solidFill>
                 <a:highlight>
                   <a:srgbClr val="FFFF00"/>
                 </a:highlight>
@@ -4414,11 +4539,18 @@
               <a:t>return</a:t>
             </a:r>
             <a:r>
-              <a:rPr lang="sk-SK" dirty="0"/>
+              <a:rPr lang="sk-SK" dirty="0">
+                <a:solidFill>
+                  <a:srgbClr val="C00000"/>
+                </a:solidFill>
+              </a:rPr>
               <a:t>, </a:t>
             </a:r>
             <a:r>
               <a:rPr lang="sk-SK" dirty="0" err="1">
+                <a:solidFill>
+                  <a:srgbClr val="C00000"/>
+                </a:solidFill>
                 <a:highlight>
                   <a:srgbClr val="FFFF00"/>
                 </a:highlight>
@@ -4427,11 +4559,18 @@
               <a:t>def</a:t>
             </a:r>
             <a:r>
-              <a:rPr lang="sk-SK" dirty="0"/>
+              <a:rPr lang="sk-SK" dirty="0">
+                <a:solidFill>
+                  <a:srgbClr val="C00000"/>
+                </a:solidFill>
+              </a:rPr>
               <a:t>, </a:t>
             </a:r>
             <a:r>
               <a:rPr lang="sk-SK" dirty="0">
+                <a:solidFill>
+                  <a:srgbClr val="C00000"/>
+                </a:solidFill>
                 <a:highlight>
                   <a:srgbClr val="FFFF00"/>
                 </a:highlight>
@@ -4440,6 +4579,9 @@
               <a:t>a=2</a:t>
             </a:r>
             <a:endParaRPr lang="fr-FR" dirty="0">
+              <a:solidFill>
+                <a:srgbClr val="C00000"/>
+              </a:solidFill>
               <a:highlight>
                 <a:srgbClr val="FFFF00"/>
               </a:highlight>
@@ -4454,86 +4596,170 @@
               <a:buNone/>
             </a:pPr>
             <a:r>
-              <a:rPr lang="fr-FR" sz="2800" b="1" dirty="0" err="1"/>
+              <a:rPr lang="fr-FR" sz="2800" b="1" dirty="0" err="1">
+                <a:highlight>
+                  <a:srgbClr val="00FFFF"/>
+                </a:highlight>
+              </a:rPr>
               <a:t>Výraz</a:t>
             </a:r>
             <a:r>
-              <a:rPr lang="fr-FR" sz="2800" dirty="0"/>
+              <a:rPr lang="fr-FR" sz="2800" dirty="0">
+                <a:highlight>
+                  <a:srgbClr val="00FFFF"/>
+                </a:highlight>
+              </a:rPr>
               <a:t> </a:t>
             </a:r>
             <a:r>
-              <a:rPr lang="sk-SK" sz="2800" dirty="0"/>
+              <a:rPr lang="sk-SK" sz="2800" dirty="0">
+                <a:highlight>
+                  <a:srgbClr val="00FFFF"/>
+                </a:highlight>
+              </a:rPr>
               <a:t>(</a:t>
             </a:r>
             <a:r>
-              <a:rPr lang="sk-SK" sz="2800" dirty="0" err="1"/>
+              <a:rPr lang="sk-SK" sz="2800" dirty="0" err="1">
+                <a:highlight>
+                  <a:srgbClr val="00FFFF"/>
+                </a:highlight>
+              </a:rPr>
               <a:t>expression</a:t>
             </a:r>
             <a:r>
-              <a:rPr lang="sk-SK" sz="2800" dirty="0"/>
+              <a:rPr lang="sk-SK" sz="2800" dirty="0">
+                <a:highlight>
+                  <a:srgbClr val="00FFFF"/>
+                </a:highlight>
+              </a:rPr>
               <a:t>) </a:t>
             </a:r>
             <a:r>
-              <a:rPr lang="fr-FR" sz="2800" dirty="0" err="1"/>
+              <a:rPr lang="fr-FR" sz="2800" dirty="0" err="1">
+                <a:highlight>
+                  <a:srgbClr val="00FFFF"/>
+                </a:highlight>
+              </a:rPr>
               <a:t>vracia</a:t>
             </a:r>
             <a:r>
-              <a:rPr lang="fr-FR" sz="2800" dirty="0"/>
+              <a:rPr lang="fr-FR" sz="2800" dirty="0">
+                <a:highlight>
+                  <a:srgbClr val="00FFFF"/>
+                </a:highlight>
+              </a:rPr>
               <a:t> </a:t>
             </a:r>
             <a:r>
-              <a:rPr lang="fr-FR" sz="2800" dirty="0" err="1"/>
+              <a:rPr lang="fr-FR" sz="2800" dirty="0" err="1">
+                <a:highlight>
+                  <a:srgbClr val="00FFFF"/>
+                </a:highlight>
+              </a:rPr>
               <a:t>hodnotu</a:t>
             </a:r>
             <a:r>
-              <a:rPr lang="fr-FR" sz="2800" dirty="0"/>
+              <a:rPr lang="fr-FR" sz="2800" dirty="0">
+                <a:highlight>
+                  <a:srgbClr val="00FFFF"/>
+                </a:highlight>
+              </a:rPr>
               <a:t> a </a:t>
             </a:r>
             <a:r>
-              <a:rPr lang="fr-FR" sz="2800" dirty="0" err="1"/>
+              <a:rPr lang="fr-FR" sz="2800" dirty="0" err="1">
+                <a:highlight>
+                  <a:srgbClr val="00FFFF"/>
+                </a:highlight>
+              </a:rPr>
               <a:t>môže</a:t>
             </a:r>
             <a:r>
-              <a:rPr lang="fr-FR" sz="2800" dirty="0"/>
+              <a:rPr lang="fr-FR" sz="2800" dirty="0">
+                <a:highlight>
+                  <a:srgbClr val="00FFFF"/>
+                </a:highlight>
+              </a:rPr>
               <a:t> </a:t>
             </a:r>
             <a:r>
-              <a:rPr lang="fr-FR" sz="2800" dirty="0" err="1"/>
+              <a:rPr lang="fr-FR" sz="2800" dirty="0" err="1">
+                <a:highlight>
+                  <a:srgbClr val="00FFFF"/>
+                </a:highlight>
+              </a:rPr>
               <a:t>byť</a:t>
             </a:r>
             <a:r>
-              <a:rPr lang="fr-FR" sz="2800" dirty="0"/>
+              <a:rPr lang="fr-FR" sz="2800" dirty="0">
+                <a:highlight>
+                  <a:srgbClr val="00FFFF"/>
+                </a:highlight>
+              </a:rPr>
               <a:t> </a:t>
             </a:r>
             <a:r>
-              <a:rPr lang="fr-FR" sz="2800" dirty="0" err="1"/>
+              <a:rPr lang="fr-FR" sz="2800" dirty="0" err="1">
+                <a:highlight>
+                  <a:srgbClr val="00FFFF"/>
+                </a:highlight>
+              </a:rPr>
               <a:t>súčasťou</a:t>
             </a:r>
             <a:r>
-              <a:rPr lang="fr-FR" sz="2800" dirty="0"/>
+              <a:rPr lang="fr-FR" sz="2800" dirty="0">
+                <a:highlight>
+                  <a:srgbClr val="00FFFF"/>
+                </a:highlight>
+              </a:rPr>
               <a:t> </a:t>
             </a:r>
             <a:r>
-              <a:rPr lang="fr-FR" sz="2800" dirty="0" err="1"/>
+              <a:rPr lang="fr-FR" sz="2800" dirty="0" err="1">
+                <a:highlight>
+                  <a:srgbClr val="00FFFF"/>
+                </a:highlight>
+              </a:rPr>
               <a:t>iných</a:t>
             </a:r>
             <a:r>
-              <a:rPr lang="fr-FR" sz="2800" dirty="0"/>
+              <a:rPr lang="fr-FR" sz="2800" dirty="0">
+                <a:highlight>
+                  <a:srgbClr val="00FFFF"/>
+                </a:highlight>
+              </a:rPr>
               <a:t> </a:t>
             </a:r>
             <a:r>
-              <a:rPr lang="fr-FR" sz="2800" dirty="0" err="1"/>
+              <a:rPr lang="fr-FR" sz="2800" dirty="0" err="1">
+                <a:highlight>
+                  <a:srgbClr val="00FFFF"/>
+                </a:highlight>
+              </a:rPr>
               <a:t>výrazov</a:t>
             </a:r>
             <a:r>
-              <a:rPr lang="fr-FR" sz="2800" dirty="0"/>
+              <a:rPr lang="fr-FR" sz="2800" dirty="0">
+                <a:highlight>
+                  <a:srgbClr val="00FFFF"/>
+                </a:highlight>
+              </a:rPr>
               <a:t> a </a:t>
             </a:r>
             <a:r>
-              <a:rPr lang="fr-FR" sz="2800" dirty="0" err="1"/>
+              <a:rPr lang="fr-FR" sz="2800" dirty="0" err="1">
+                <a:highlight>
+                  <a:srgbClr val="00FFFF"/>
+                </a:highlight>
+              </a:rPr>
               <a:t>príkazov</a:t>
             </a:r>
-            <a:endParaRPr lang="sk-SK" sz="2800" dirty="0"/>
+            <a:endParaRPr lang="sk-SK" sz="2800" dirty="0">
+              <a:highlight>
+                <a:srgbClr val="00FFFF"/>
+              </a:highlight>
+            </a:endParaRPr>
           </a:p>
           <a:p>
             <a:pPr marL="0" indent="0">
@@ -4544,6 +4770,9 @@
             </a:pPr>
             <a:r>
               <a:rPr lang="sk-SK" dirty="0">
+                <a:solidFill>
+                  <a:srgbClr val="C00000"/>
+                </a:solidFill>
                 <a:highlight>
                   <a:srgbClr val="FFFF00"/>
                 </a:highlight>
@@ -4552,11 +4781,18 @@
               <a:t>1+2</a:t>
             </a:r>
             <a:r>
-              <a:rPr lang="sk-SK" i="1" dirty="0"/>
+              <a:rPr lang="sk-SK" i="1" dirty="0">
+                <a:solidFill>
+                  <a:srgbClr val="C00000"/>
+                </a:solidFill>
+              </a:rPr>
               <a:t>, </a:t>
             </a:r>
             <a:r>
               <a:rPr lang="sk-SK" dirty="0" err="1">
+                <a:solidFill>
+                  <a:srgbClr val="C00000"/>
+                </a:solidFill>
                 <a:highlight>
                   <a:srgbClr val="FFFF00"/>
                 </a:highlight>
@@ -4566,6 +4802,9 @@
             </a:r>
             <a:r>
               <a:rPr lang="sk-SK" dirty="0">
+                <a:solidFill>
+                  <a:srgbClr val="C00000"/>
+                </a:solidFill>
                 <a:highlight>
                   <a:srgbClr val="FFFF00"/>
                 </a:highlight>
@@ -4574,11 +4813,18 @@
               <a:t>()</a:t>
             </a:r>
             <a:r>
-              <a:rPr lang="sk-SK" dirty="0"/>
+              <a:rPr lang="sk-SK" dirty="0">
+                <a:solidFill>
+                  <a:srgbClr val="C00000"/>
+                </a:solidFill>
+              </a:rPr>
               <a:t>, </a:t>
             </a:r>
             <a:r>
               <a:rPr lang="sk-SK" dirty="0">
+                <a:solidFill>
+                  <a:srgbClr val="C00000"/>
+                </a:solidFill>
                 <a:highlight>
                   <a:srgbClr val="FFFF00"/>
                 </a:highlight>
@@ -5064,7 +5310,11 @@
           <a:p>
             <a:pPr algn="r"/>
             <a:r>
-              <a:rPr lang="sk-SK" sz="4000" dirty="0"/>
+              <a:rPr lang="sk-SK" sz="4000" dirty="0">
+                <a:highlight>
+                  <a:srgbClr val="00FFFF"/>
+                </a:highlight>
+              </a:rPr>
               <a:t>Základné dátové typy</a:t>
             </a:r>
           </a:p>
@@ -5160,6 +5410,9 @@
             </a:pPr>
             <a:r>
               <a:rPr lang="en-US" dirty="0">
+                <a:solidFill>
+                  <a:srgbClr val="C00000"/>
+                </a:solidFill>
                 <a:highlight>
                   <a:srgbClr val="FFFF00"/>
                 </a:highlight>
@@ -5168,11 +5421,18 @@
               <a:t>int</a:t>
             </a:r>
             <a:r>
-              <a:rPr lang="en-US" dirty="0"/>
+              <a:rPr lang="en-US" dirty="0">
+                <a:solidFill>
+                  <a:srgbClr val="C00000"/>
+                </a:solidFill>
+              </a:rPr>
               <a:t>, </a:t>
             </a:r>
             <a:r>
               <a:rPr lang="en-US" dirty="0">
+                <a:solidFill>
+                  <a:srgbClr val="C00000"/>
+                </a:solidFill>
                 <a:highlight>
                   <a:srgbClr val="FFFF00"/>
                 </a:highlight>
@@ -5181,6 +5441,9 @@
               <a:t>float</a:t>
             </a:r>
             <a:endParaRPr lang="sk-SK" dirty="0">
+              <a:solidFill>
+                <a:srgbClr val="C00000"/>
+              </a:solidFill>
               <a:highlight>
                 <a:srgbClr val="FFFF00"/>
               </a:highlight>
@@ -5195,6 +5458,9 @@
             </a:pPr>
             <a:r>
               <a:rPr lang="sk-SK" dirty="0">
+                <a:solidFill>
+                  <a:srgbClr val="C00000"/>
+                </a:solidFill>
                 <a:highlight>
                   <a:srgbClr val="FFFF00"/>
                 </a:highlight>
@@ -5204,6 +5470,9 @@
             </a:r>
             <a:r>
               <a:rPr lang="en-US" dirty="0">
+                <a:solidFill>
+                  <a:srgbClr val="C00000"/>
+                </a:solidFill>
                 <a:highlight>
                   <a:srgbClr val="FFFF00"/>
                 </a:highlight>
@@ -5212,6 +5481,9 @@
               <a:t>tr</a:t>
             </a:r>
             <a:endParaRPr lang="sk-SK" dirty="0">
+              <a:solidFill>
+                <a:srgbClr val="C00000"/>
+              </a:solidFill>
               <a:highlight>
                 <a:srgbClr val="FFFF00"/>
               </a:highlight>
@@ -5226,6 +5498,9 @@
             </a:pPr>
             <a:r>
               <a:rPr lang="sk-SK" dirty="0">
+                <a:solidFill>
+                  <a:srgbClr val="C00000"/>
+                </a:solidFill>
                 <a:highlight>
                   <a:srgbClr val="FFFF00"/>
                 </a:highlight>
@@ -5235,6 +5510,9 @@
             </a:r>
             <a:r>
               <a:rPr lang="en-US" dirty="0" err="1">
+                <a:solidFill>
+                  <a:srgbClr val="C00000"/>
+                </a:solidFill>
                 <a:highlight>
                   <a:srgbClr val="FFFF00"/>
                 </a:highlight>
@@ -5243,6 +5521,9 @@
               <a:t>ool</a:t>
             </a:r>
             <a:endParaRPr lang="sk-SK" dirty="0">
+              <a:solidFill>
+                <a:srgbClr val="C00000"/>
+              </a:solidFill>
               <a:highlight>
                 <a:srgbClr val="FFFF00"/>
               </a:highlight>
@@ -5257,6 +5538,9 @@
             </a:pPr>
             <a:r>
               <a:rPr lang="en-US" dirty="0">
+                <a:solidFill>
+                  <a:srgbClr val="C00000"/>
+                </a:solidFill>
                 <a:highlight>
                   <a:srgbClr val="FFFF00"/>
                 </a:highlight>
@@ -5265,11 +5549,18 @@
               <a:t>list</a:t>
             </a:r>
             <a:r>
-              <a:rPr lang="en-US" dirty="0"/>
+              <a:rPr lang="en-US" dirty="0">
+                <a:solidFill>
+                  <a:srgbClr val="C00000"/>
+                </a:solidFill>
+              </a:rPr>
               <a:t>, </a:t>
             </a:r>
             <a:r>
               <a:rPr lang="en-US" dirty="0">
+                <a:solidFill>
+                  <a:srgbClr val="C00000"/>
+                </a:solidFill>
                 <a:highlight>
                   <a:srgbClr val="FFFF00"/>
                 </a:highlight>
@@ -5278,6 +5569,9 @@
               <a:t>tuple</a:t>
             </a:r>
             <a:endParaRPr lang="sk-SK" dirty="0">
+              <a:solidFill>
+                <a:srgbClr val="C00000"/>
+              </a:solidFill>
               <a:highlight>
                 <a:srgbClr val="FFFF00"/>
               </a:highlight>
@@ -5292,6 +5586,9 @@
             </a:pPr>
             <a:r>
               <a:rPr lang="en-US" dirty="0">
+                <a:solidFill>
+                  <a:srgbClr val="C00000"/>
+                </a:solidFill>
                 <a:highlight>
                   <a:srgbClr val="FFFF00"/>
                 </a:highlight>
@@ -5300,11 +5597,18 @@
               <a:t>set</a:t>
             </a:r>
             <a:r>
-              <a:rPr lang="en-US" dirty="0"/>
+              <a:rPr lang="en-US" dirty="0">
+                <a:solidFill>
+                  <a:srgbClr val="C00000"/>
+                </a:solidFill>
+              </a:rPr>
               <a:t>, </a:t>
             </a:r>
             <a:r>
               <a:rPr lang="en-US" dirty="0" err="1">
+                <a:solidFill>
+                  <a:srgbClr val="C00000"/>
+                </a:solidFill>
                 <a:highlight>
                   <a:srgbClr val="FFFF00"/>
                 </a:highlight>
@@ -5313,6 +5617,9 @@
               <a:t>dict</a:t>
             </a:r>
             <a:endParaRPr lang="sk-SK" dirty="0">
+              <a:solidFill>
+                <a:srgbClr val="C00000"/>
+              </a:solidFill>
               <a:highlight>
                 <a:srgbClr val="FFFF00"/>
               </a:highlight>
@@ -5430,9 +5737,113 @@
               <a:buNone/>
             </a:pPr>
             <a:r>
-              <a:rPr lang="sk-SK" sz="2800" dirty="0"/>
-              <a:t>Funkciu vytvorím pomocou </a:t>
-            </a:r>
+              <a:rPr lang="sk-SK" b="1" dirty="0" err="1">
+                <a:highlight>
+                  <a:srgbClr val="00FFFF"/>
+                </a:highlight>
+              </a:rPr>
+              <a:t>def</a:t>
+            </a:r>
+            <a:r>
+              <a:rPr lang="sk-SK" dirty="0">
+                <a:highlight>
+                  <a:srgbClr val="00FFFF"/>
+                </a:highlight>
+              </a:rPr>
+              <a:t> – funkcia</a:t>
+            </a:r>
+            <a:endParaRPr lang="en-US" dirty="0">
+              <a:highlight>
+                <a:srgbClr val="00FFFF"/>
+              </a:highlight>
+            </a:endParaRPr>
+          </a:p>
+          <a:p>
+            <a:pPr>
+              <a:spcBef>
+                <a:spcPts val="1200"/>
+              </a:spcBef>
+            </a:pPr>
+            <a:r>
+              <a:rPr lang="sk-SK" dirty="0">
+                <a:highlight>
+                  <a:srgbClr val="00FFFF"/>
+                </a:highlight>
+              </a:rPr>
+              <a:t>parametre môžu mať </a:t>
+            </a:r>
+            <a:r>
+              <a:rPr lang="sk-SK" dirty="0" err="1">
+                <a:highlight>
+                  <a:srgbClr val="00FFFF"/>
+                </a:highlight>
+              </a:rPr>
+              <a:t>defaultnú</a:t>
+            </a:r>
+            <a:r>
+              <a:rPr lang="sk-SK" dirty="0">
+                <a:highlight>
+                  <a:srgbClr val="00FFFF"/>
+                </a:highlight>
+              </a:rPr>
+              <a:t> hodnotu</a:t>
+            </a:r>
+            <a:endParaRPr lang="en-US" dirty="0">
+              <a:highlight>
+                <a:srgbClr val="00FFFF"/>
+              </a:highlight>
+            </a:endParaRPr>
+          </a:p>
+          <a:p>
+            <a:pPr>
+              <a:spcBef>
+                <a:spcPts val="1200"/>
+              </a:spcBef>
+            </a:pPr>
+            <a:r>
+              <a:rPr lang="sk-SK" dirty="0">
+                <a:highlight>
+                  <a:srgbClr val="00FFFF"/>
+                </a:highlight>
+              </a:rPr>
+              <a:t>pozičné </a:t>
+            </a:r>
+            <a:r>
+              <a:rPr lang="sk-SK" dirty="0" err="1">
+                <a:highlight>
+                  <a:srgbClr val="00FFFF"/>
+                </a:highlight>
+              </a:rPr>
+              <a:t>vs</a:t>
+            </a:r>
+            <a:r>
+              <a:rPr lang="sk-SK" dirty="0">
+                <a:highlight>
+                  <a:srgbClr val="00FFFF"/>
+                </a:highlight>
+              </a:rPr>
+              <a:t> kľúčové parametre</a:t>
+            </a:r>
+          </a:p>
+          <a:p>
+            <a:pPr>
+              <a:spcBef>
+                <a:spcPts val="1200"/>
+              </a:spcBef>
+            </a:pPr>
+            <a:endParaRPr lang="en-US" dirty="0">
+              <a:highlight>
+                <a:srgbClr val="00FFFF"/>
+              </a:highlight>
+            </a:endParaRPr>
+          </a:p>
+          <a:p>
+            <a:pPr marL="0" indent="0">
+              <a:spcBef>
+                <a:spcPts val="1200"/>
+              </a:spcBef>
+              <a:buNone/>
+            </a:pPr>
             <a:r>
               <a:rPr lang="sk-SK" sz="2800" dirty="0" err="1">
                 <a:highlight>
@@ -5442,6 +5853,65 @@
               </a:rPr>
               <a:t>def</a:t>
             </a:r>
+            <a:r>
+              <a:rPr lang="sk-SK" sz="2800" dirty="0">
+                <a:highlight>
+                  <a:srgbClr val="FFFF00"/>
+                </a:highlight>
+                <a:latin typeface="Consolas" panose="020B0609020204030204" pitchFamily="49" charset="0"/>
+              </a:rPr>
+              <a:t> </a:t>
+            </a:r>
+            <a:r>
+              <a:rPr lang="sk-SK" sz="2800" dirty="0" err="1">
+                <a:highlight>
+                  <a:srgbClr val="FFFF00"/>
+                </a:highlight>
+                <a:latin typeface="Consolas" panose="020B0609020204030204" pitchFamily="49" charset="0"/>
+              </a:rPr>
+              <a:t>vypocitaj_cenu</a:t>
+            </a:r>
+            <a:r>
+              <a:rPr lang="sk-SK" sz="2800" dirty="0">
+                <a:highlight>
+                  <a:srgbClr val="FFFF00"/>
+                </a:highlight>
+                <a:latin typeface="Consolas" panose="020B0609020204030204" pitchFamily="49" charset="0"/>
+              </a:rPr>
+              <a:t>(cena, </a:t>
+            </a:r>
+            <a:r>
+              <a:rPr lang="sk-SK" sz="2800" dirty="0" err="1">
+                <a:highlight>
+                  <a:srgbClr val="FFFF00"/>
+                </a:highlight>
+                <a:latin typeface="Consolas" panose="020B0609020204030204" pitchFamily="49" charset="0"/>
+              </a:rPr>
+              <a:t>zlava</a:t>
+            </a:r>
+            <a:r>
+              <a:rPr lang="sk-SK" sz="2800" dirty="0">
+                <a:highlight>
+                  <a:srgbClr val="FFFF00"/>
+                </a:highlight>
+                <a:latin typeface="Consolas" panose="020B0609020204030204" pitchFamily="49" charset="0"/>
+              </a:rPr>
+              <a:t>=0.0):</a:t>
+            </a:r>
+            <a:endParaRPr lang="en-US" sz="2800" dirty="0">
+              <a:highlight>
+                <a:srgbClr val="FFFF00"/>
+              </a:highlight>
+              <a:latin typeface="Consolas" panose="020B0609020204030204" pitchFamily="49" charset="0"/>
+            </a:endParaRPr>
+          </a:p>
+          <a:p>
+            <a:pPr marL="0" indent="0">
+              <a:spcBef>
+                <a:spcPts val="1200"/>
+              </a:spcBef>
+              <a:buNone/>
+            </a:pPr>
             <a:endParaRPr lang="sk-SK" sz="2800" dirty="0">
               <a:highlight>
                 <a:srgbClr val="FFFF00"/>
@@ -5450,99 +5920,7 @@
             </a:endParaRPr>
           </a:p>
           <a:p>
-            <a:pPr lvl="1">
-              <a:spcBef>
-                <a:spcPts val="1200"/>
-              </a:spcBef>
-            </a:pPr>
-            <a:r>
-              <a:rPr lang="sk-SK" sz="2800" dirty="0"/>
-              <a:t>parametrom môžem priradiť </a:t>
-            </a:r>
-            <a:r>
-              <a:rPr lang="sk-SK" sz="2800" dirty="0" err="1"/>
-              <a:t>defaultnú</a:t>
-            </a:r>
-            <a:r>
-              <a:rPr lang="sk-SK" sz="2800" dirty="0"/>
-              <a:t> hodnotu</a:t>
-            </a:r>
-          </a:p>
-          <a:p>
-            <a:pPr marL="457200" lvl="1" indent="0">
-              <a:spcBef>
-                <a:spcPts val="1200"/>
-              </a:spcBef>
-              <a:buNone/>
-            </a:pPr>
-            <a:r>
-              <a:rPr lang="sk-SK" sz="2800" dirty="0" err="1">
-                <a:highlight>
-                  <a:srgbClr val="FFFF00"/>
-                </a:highlight>
-                <a:latin typeface="Consolas" panose="020B0609020204030204" pitchFamily="49" charset="0"/>
-              </a:rPr>
-              <a:t>def</a:t>
-            </a:r>
-            <a:r>
-              <a:rPr lang="sk-SK" sz="2800" dirty="0">
-                <a:highlight>
-                  <a:srgbClr val="FFFF00"/>
-                </a:highlight>
-                <a:latin typeface="Consolas" panose="020B0609020204030204" pitchFamily="49" charset="0"/>
-              </a:rPr>
-              <a:t> </a:t>
-            </a:r>
-            <a:r>
-              <a:rPr lang="sk-SK" sz="2800" dirty="0" err="1">
-                <a:highlight>
-                  <a:srgbClr val="FFFF00"/>
-                </a:highlight>
-                <a:latin typeface="Consolas" panose="020B0609020204030204" pitchFamily="49" charset="0"/>
-              </a:rPr>
-              <a:t>vypocitaj_cenu</a:t>
-            </a:r>
-            <a:r>
-              <a:rPr lang="sk-SK" sz="2800" dirty="0">
-                <a:highlight>
-                  <a:srgbClr val="FFFF00"/>
-                </a:highlight>
-                <a:latin typeface="Consolas" panose="020B0609020204030204" pitchFamily="49" charset="0"/>
-              </a:rPr>
-              <a:t>(cena, </a:t>
-            </a:r>
-            <a:r>
-              <a:rPr lang="sk-SK" sz="2800" dirty="0" err="1">
-                <a:highlight>
-                  <a:srgbClr val="FFFF00"/>
-                </a:highlight>
-                <a:latin typeface="Consolas" panose="020B0609020204030204" pitchFamily="49" charset="0"/>
-              </a:rPr>
-              <a:t>zlava</a:t>
-            </a:r>
-            <a:r>
-              <a:rPr lang="sk-SK" sz="2800" dirty="0">
-                <a:highlight>
-                  <a:srgbClr val="FFFF00"/>
-                </a:highlight>
-                <a:latin typeface="Consolas" panose="020B0609020204030204" pitchFamily="49" charset="0"/>
-              </a:rPr>
-              <a:t>=0.0):</a:t>
-            </a:r>
-          </a:p>
-          <a:p>
-            <a:pPr lvl="1">
-              <a:spcBef>
-                <a:spcPts val="1200"/>
-              </a:spcBef>
-            </a:pPr>
-            <a:r>
-              <a:rPr lang="sk-SK" sz="2800" dirty="0"/>
-              <a:t>vieme použiť aj kľúčové zadávanie parametrov</a:t>
-            </a:r>
-          </a:p>
-          <a:p>
-            <a:pPr marL="457200" lvl="1" indent="0">
+            <a:pPr marL="0" indent="0">
               <a:spcBef>
                 <a:spcPts val="1200"/>
               </a:spcBef>
@@ -5696,15 +6074,27 @@
               <a:buNone/>
             </a:pPr>
             <a:r>
-              <a:rPr lang="sk-SK" sz="2800" dirty="0"/>
+              <a:rPr lang="sk-SK" sz="2800" dirty="0">
+                <a:highlight>
+                  <a:srgbClr val="00FFFF"/>
+                </a:highlight>
+              </a:rPr>
               <a:t>Podmienka </a:t>
             </a:r>
             <a:r>
-              <a:rPr lang="sk-SK" sz="2800" dirty="0" err="1"/>
+              <a:rPr lang="sk-SK" sz="2800" dirty="0" err="1">
+                <a:highlight>
+                  <a:srgbClr val="00FFFF"/>
+                </a:highlight>
+              </a:rPr>
               <a:t>if</a:t>
             </a:r>
             <a:r>
-              <a:rPr lang="sk-SK" sz="2800" dirty="0"/>
+              <a:rPr lang="sk-SK" sz="2800" dirty="0">
+                <a:highlight>
+                  <a:srgbClr val="00FFFF"/>
+                </a:highlight>
+              </a:rPr>
               <a:t>:</a:t>
             </a:r>
           </a:p>
@@ -5716,6 +6106,9 @@
             </a:pPr>
             <a:r>
               <a:rPr lang="sk-SK" sz="2800" dirty="0" err="1">
+                <a:solidFill>
+                  <a:srgbClr val="C00000"/>
+                </a:solidFill>
                 <a:highlight>
                   <a:srgbClr val="FFFF00"/>
                 </a:highlight>
@@ -5724,11 +6117,18 @@
               <a:t>if</a:t>
             </a:r>
             <a:r>
-              <a:rPr lang="sk-SK" sz="2800" dirty="0"/>
+              <a:rPr lang="sk-SK" sz="2800" dirty="0">
+                <a:solidFill>
+                  <a:srgbClr val="C00000"/>
+                </a:solidFill>
+              </a:rPr>
               <a:t>, </a:t>
             </a:r>
             <a:r>
               <a:rPr lang="sk-SK" sz="2800" dirty="0" err="1">
+                <a:solidFill>
+                  <a:srgbClr val="C00000"/>
+                </a:solidFill>
                 <a:highlight>
                   <a:srgbClr val="FFFF00"/>
                 </a:highlight>
@@ -5737,11 +6137,18 @@
               <a:t>elif</a:t>
             </a:r>
             <a:r>
-              <a:rPr lang="sk-SK" sz="2800" dirty="0"/>
+              <a:rPr lang="sk-SK" sz="2800" dirty="0">
+                <a:solidFill>
+                  <a:srgbClr val="C00000"/>
+                </a:solidFill>
+              </a:rPr>
               <a:t>, </a:t>
             </a:r>
             <a:r>
               <a:rPr lang="sk-SK" sz="2800" dirty="0" err="1">
+                <a:solidFill>
+                  <a:srgbClr val="C00000"/>
+                </a:solidFill>
                 <a:highlight>
                   <a:srgbClr val="FFFF00"/>
                 </a:highlight>
@@ -5750,6 +6157,9 @@
               <a:t>else</a:t>
             </a:r>
             <a:endParaRPr lang="sk-SK" sz="2800" dirty="0">
+              <a:solidFill>
+                <a:srgbClr val="C00000"/>
+              </a:solidFill>
               <a:highlight>
                 <a:srgbClr val="FFFF00"/>
               </a:highlight>
@@ -5763,21 +6173,49 @@
               </a:spcBef>
             </a:pPr>
             <a:r>
-              <a:rPr lang="sk-SK" sz="2800" dirty="0" err="1"/>
+              <a:rPr lang="sk-SK" sz="2800" dirty="0" err="1">
+                <a:highlight>
+                  <a:srgbClr val="00FFFF"/>
+                </a:highlight>
+              </a:rPr>
               <a:t>ternárny</a:t>
             </a:r>
             <a:r>
-              <a:rPr lang="sk-SK" sz="2800" dirty="0"/>
+              <a:rPr lang="sk-SK" sz="2800" dirty="0">
+                <a:highlight>
+                  <a:srgbClr val="00FFFF"/>
+                </a:highlight>
+              </a:rPr>
               <a:t> operátor je </a:t>
             </a:r>
             <a:r>
-              <a:rPr lang="sk-SK" sz="2800" dirty="0" err="1"/>
+              <a:rPr lang="sk-SK" sz="2800" dirty="0" err="1">
+                <a:highlight>
+                  <a:srgbClr val="00FFFF"/>
+                </a:highlight>
+              </a:rPr>
               <a:t>if</a:t>
             </a:r>
             <a:r>
-              <a:rPr lang="sk-SK" sz="2800" dirty="0"/>
+              <a:rPr lang="sk-SK" sz="2800" dirty="0">
+                <a:highlight>
+                  <a:srgbClr val="00FFFF"/>
+                </a:highlight>
+              </a:rPr>
               <a:t> ako výraz</a:t>
             </a:r>
+          </a:p>
+          <a:p>
+            <a:pPr lvl="1">
+              <a:spcBef>
+                <a:spcPts val="1200"/>
+              </a:spcBef>
+            </a:pPr>
+            <a:endParaRPr lang="sk-SK" sz="2800" dirty="0">
+              <a:highlight>
+                <a:srgbClr val="00FFFF"/>
+              </a:highlight>
+            </a:endParaRPr>
           </a:p>
           <a:p>
             <a:pPr marL="0" indent="0">
@@ -5919,10 +6357,18 @@
               <a:buNone/>
             </a:pPr>
             <a:r>
-              <a:rPr lang="en-US" sz="4000" dirty="0" err="1"/>
+              <a:rPr lang="en-US" sz="4000" dirty="0" err="1">
+                <a:highlight>
+                  <a:srgbClr val="00FFFF"/>
+                </a:highlight>
+              </a:rPr>
               <a:t>Výnimky</a:t>
             </a:r>
-            <a:endParaRPr lang="en-US" sz="4000" dirty="0"/>
+            <a:endParaRPr lang="en-US" sz="4000" dirty="0">
+              <a:highlight>
+                <a:srgbClr val="00FFFF"/>
+              </a:highlight>
+            </a:endParaRPr>
           </a:p>
           <a:p>
             <a:pPr lvl="1">
@@ -5932,6 +6378,9 @@
             </a:pPr>
             <a:r>
               <a:rPr lang="en-US" sz="2800" dirty="0">
+                <a:solidFill>
+                  <a:srgbClr val="C00000"/>
+                </a:solidFill>
                 <a:highlight>
                   <a:srgbClr val="FFFF00"/>
                 </a:highlight>
@@ -5940,11 +6389,18 @@
               <a:t>try</a:t>
             </a:r>
             <a:r>
-              <a:rPr lang="en-US" sz="2800" dirty="0"/>
+              <a:rPr lang="en-US" sz="2800" dirty="0">
+                <a:solidFill>
+                  <a:srgbClr val="C00000"/>
+                </a:solidFill>
+              </a:rPr>
               <a:t>, </a:t>
             </a:r>
             <a:r>
               <a:rPr lang="en-US" sz="2800" dirty="0">
+                <a:solidFill>
+                  <a:srgbClr val="C00000"/>
+                </a:solidFill>
                 <a:highlight>
                   <a:srgbClr val="FFFF00"/>
                 </a:highlight>
@@ -5961,6 +6417,9 @@
             </a:pPr>
             <a:r>
               <a:rPr lang="en-US" sz="2800" dirty="0">
+                <a:solidFill>
+                  <a:srgbClr val="C00000"/>
+                </a:solidFill>
                 <a:highlight>
                   <a:srgbClr val="FFFF00"/>
                 </a:highlight>
@@ -5969,11 +6428,18 @@
               <a:t>finally</a:t>
             </a:r>
             <a:r>
-              <a:rPr lang="en-US" sz="2800" dirty="0"/>
+              <a:rPr lang="en-US" sz="2800" dirty="0">
+                <a:solidFill>
+                  <a:srgbClr val="C00000"/>
+                </a:solidFill>
+              </a:rPr>
               <a:t>, </a:t>
             </a:r>
             <a:r>
               <a:rPr lang="en-US" sz="2800" dirty="0">
+                <a:solidFill>
+                  <a:srgbClr val="C00000"/>
+                </a:solidFill>
                 <a:highlight>
                   <a:srgbClr val="FFFF00"/>
                 </a:highlight>
@@ -5982,6 +6448,9 @@
               <a:t>raise</a:t>
             </a:r>
             <a:endParaRPr lang="sk-SK" sz="2800" dirty="0">
+              <a:solidFill>
+                <a:srgbClr val="C00000"/>
+              </a:solidFill>
               <a:highlight>
                 <a:srgbClr val="FFFF00"/>
               </a:highlight>
@@ -6038,7 +6507,11 @@
           </a:lstStyle>
           <a:p>
             <a:r>
-              <a:rPr lang="sk-SK" sz="4000" dirty="0"/>
+              <a:rPr lang="sk-SK" sz="4000" dirty="0">
+                <a:highlight>
+                  <a:srgbClr val="00FFFF"/>
+                </a:highlight>
+              </a:rPr>
               <a:t>Cykly</a:t>
             </a:r>
           </a:p>
@@ -6060,8 +6533,8 @@
         </p:nvSpPr>
         <p:spPr>
           <a:xfrm>
-            <a:off x="1790700" y="1739220"/>
-            <a:ext cx="8066314" cy="1809523"/>
+            <a:off x="1573162" y="1690059"/>
+            <a:ext cx="8028214" cy="1809523"/>
           </a:xfrm>
           <a:prstGeom prst="rect">
             <a:avLst/>
@@ -6243,6 +6716,9 @@
             </a:pPr>
             <a:r>
               <a:rPr lang="sk-SK" sz="2800" dirty="0" err="1">
+                <a:solidFill>
+                  <a:srgbClr val="C00000"/>
+                </a:solidFill>
                 <a:highlight>
                   <a:srgbClr val="FFFF00"/>
                 </a:highlight>
@@ -6252,7 +6728,15 @@
             </a:r>
             <a:r>
               <a:rPr lang="sk-SK" sz="2800" dirty="0"/>
-              <a:t> pre kolekcie a rozsahy</a:t>
+              <a:t> </a:t>
+            </a:r>
+            <a:r>
+              <a:rPr lang="sk-SK" sz="2800" dirty="0">
+                <a:highlight>
+                  <a:srgbClr val="00FFFF"/>
+                </a:highlight>
+              </a:rPr>
+              <a:t>pre kolekcie a rozsahy</a:t>
             </a:r>
           </a:p>
           <a:p>
@@ -6263,6 +6747,9 @@
             </a:pPr>
             <a:r>
               <a:rPr lang="sk-SK" sz="2800" dirty="0" err="1">
+                <a:solidFill>
+                  <a:srgbClr val="C00000"/>
+                </a:solidFill>
                 <a:highlight>
                   <a:srgbClr val="FFFF00"/>
                 </a:highlight>
@@ -6272,7 +6759,15 @@
             </a:r>
             <a:r>
               <a:rPr lang="sk-SK" sz="2800" dirty="0"/>
-              <a:t> ak máme ukončovaciu podmienku</a:t>
+              <a:t> </a:t>
+            </a:r>
+            <a:r>
+              <a:rPr lang="sk-SK" sz="2800" dirty="0">
+                <a:highlight>
+                  <a:srgbClr val="00FFFF"/>
+                </a:highlight>
+              </a:rPr>
+              <a:t>ak máme ukončovaciu podmienku</a:t>
             </a:r>
           </a:p>
           <a:p>
@@ -6283,6 +6778,9 @@
             </a:pPr>
             <a:r>
               <a:rPr lang="sk-SK" sz="2800" dirty="0">
+                <a:solidFill>
+                  <a:srgbClr val="C00000"/>
+                </a:solidFill>
                 <a:highlight>
                   <a:srgbClr val="FFFF00"/>
                 </a:highlight>
@@ -6296,6 +6794,9 @@
             </a:r>
             <a:r>
               <a:rPr lang="sk-SK" sz="2800" dirty="0" err="1">
+                <a:solidFill>
+                  <a:srgbClr val="C00000"/>
+                </a:solidFill>
                 <a:highlight>
                   <a:srgbClr val="FFFF00"/>
                 </a:highlight>
@@ -6303,7 +6804,11 @@
               </a:rPr>
               <a:t>continue</a:t>
             </a:r>
-            <a:endParaRPr lang="sk-SK" sz="2800" dirty="0"/>
+            <a:endParaRPr lang="sk-SK" sz="2800" dirty="0">
+              <a:solidFill>
+                <a:srgbClr val="C00000"/>
+              </a:solidFill>
+            </a:endParaRPr>
           </a:p>
           <a:p>
             <a:pPr>
